--- a/ROM_Set_Membership_to_RAM.pptx
+++ b/ROM_Set_Membership_to_RAM.pptx
@@ -17,7 +17,7 @@
     <p:sldId id="265" r:id="rId10"/>
     <p:sldId id="266" r:id="rId11"/>
   </p:sldIdLst>
-  <p:sldSz cx="13333333" cy="7500000" type="wide"/>
+  <p:sldSz cx="13333333" cy="7500000" type="custom"/>
   <p:notesSz cx="6858000" cy="9144000"/>
   <p:defaultTextStyle/>
 </p:presentation>
@@ -8852,15 +8852,46 @@
         <a:solidFill>
           <a:schemeClr val="phClr"/>
         </a:solidFill>
+        <a:solidFill>
+          <a:schemeClr val="phClr">
+            <a:tint val="50000"/>
+            <a:satMod val="300000"/>
+          </a:schemeClr>
+        </a:solidFill>
+        <a:solidFill>
+          <a:schemeClr val="phClr">
+            <a:tint val="20000"/>
+            <a:satMod val="255000"/>
+          </a:schemeClr>
+        </a:solidFill>
       </a:fillStyleLst>
       <a:lnStyleLst>
-        <a:ln w="9525">
+        <a:ln w="6350" cap="flat" cmpd="sng" algn="ctr">
           <a:solidFill>
             <a:schemeClr val="phClr"/>
           </a:solidFill>
+          <a:prstDash val="solid"/>
+        </a:ln>
+        <a:ln w="12700" cap="flat" cmpd="sng" algn="ctr">
+          <a:solidFill>
+            <a:schemeClr val="phClr"/>
+          </a:solidFill>
+          <a:prstDash val="solid"/>
+        </a:ln>
+        <a:ln w="19050" cap="flat" cmpd="sng" algn="ctr">
+          <a:solidFill>
+            <a:schemeClr val="phClr"/>
+          </a:solidFill>
+          <a:prstDash val="solid"/>
         </a:ln>
       </a:lnStyleLst>
       <a:effectStyleLst>
+        <a:effectStyle>
+          <a:effectLst/>
+        </a:effectStyle>
+        <a:effectStyle>
+          <a:effectLst/>
+        </a:effectStyle>
         <a:effectStyle>
           <a:effectLst/>
         </a:effectStyle>
@@ -8869,6 +8900,18 @@
         <a:solidFill>
           <a:schemeClr val="phClr"/>
         </a:solidFill>
+        <a:solidFill>
+          <a:schemeClr val="phClr">
+            <a:tint val="95000"/>
+            <a:satMod val="170000"/>
+          </a:schemeClr>
+        </a:solidFill>
+        <a:solidFill>
+          <a:schemeClr val="phClr">
+            <a:shade val="60000"/>
+            <a:satMod val="120000"/>
+          </a:schemeClr>
+        </a:solidFill>
       </a:bgFillStyleLst>
     </a:fmtScheme>
   </a:themeElements>
